--- a/results/regression.pptx
+++ b/results/regression.pptx
@@ -2253,7 +2253,7 @@
                         <a:buNone/>
                       </a:pPr>
                       <a:r>
-                        <a:rPr cap="none" sz="1100" i="0" b="0" u="none">
+                        <a:rPr cap="none" sz="1100" i="0" b="0" u="none" strike="noStrike">
                           <a:solidFill>
                             <a:srgbClr val="000000">
                               <a:alpha val="100000"/>
@@ -2305,7 +2305,7 @@
                     <a:bodyPr/>
                     <a:lstStyle/>
                     <a:p>
-                      <a:pPr algn="l" marL="63500" marR="63500">
+                      <a:pPr algn="ctr" marL="63500" marR="63500">
                         <a:lnSpc>
                           <a:spcPct val="100000"/>
                         </a:lnSpc>
@@ -2318,7 +2318,7 @@
                         <a:buNone/>
                       </a:pPr>
                       <a:r>
-                        <a:rPr cap="none" sz="1100" i="0" b="0" u="none">
+                        <a:rPr cap="none" sz="1100" i="0" b="0" u="none" strike="noStrike">
                           <a:solidFill>
                             <a:srgbClr val="000000">
                               <a:alpha val="100000"/>
@@ -2385,7 +2385,7 @@
                         <a:buNone/>
                       </a:pPr>
                       <a:r>
-                        <a:rPr cap="none" sz="1100" i="0" b="0" u="none">
+                        <a:rPr cap="none" sz="1100" i="0" b="0" u="none" strike="noStrike">
                           <a:solidFill>
                             <a:srgbClr val="000000">
                               <a:alpha val="100000"/>
@@ -2429,7 +2429,7 @@
                     <a:bodyPr/>
                     <a:lstStyle/>
                     <a:p>
-                      <a:pPr algn="l" marL="63500" marR="63500">
+                      <a:pPr algn="ctr" marL="63500" marR="63500">
                         <a:lnSpc>
                           <a:spcPct val="100000"/>
                         </a:lnSpc>
@@ -2442,7 +2442,7 @@
                         <a:buNone/>
                       </a:pPr>
                       <a:r>
-                        <a:rPr cap="none" sz="1100" i="0" b="0" u="none">
+                        <a:rPr cap="none" sz="1100" i="0" b="0" u="none" strike="noStrike">
                           <a:solidFill>
                             <a:srgbClr val="000000">
                               <a:alpha val="100000"/>
@@ -2500,7 +2500,7 @@
                         </a:spcAft>
                         <a:buNone/>
                       </a:pPr>
-                      <a:endParaRPr cap="none" sz="1100" i="0" b="0" u="none">
+                      <a:endParaRPr cap="none" sz="1100" i="0" b="0" u="none" strike="noStrike">
                         <a:solidFill>
                           <a:srgbClr val="000000">
                             <a:alpha val="100000"/>
@@ -2512,7 +2512,7 @@
                         <a:sym typeface="Helvetica"/>
                       </a:endParaRPr>
                       <a:r>
-                        <a:rPr cap="none" sz="1100" i="0" b="0" u="none">
+                        <a:rPr cap="none" sz="1100" i="0" b="0" u="none" strike="noStrike">
                           <a:solidFill>
                             <a:srgbClr val="000000">
                               <a:alpha val="100000"/>
@@ -2556,7 +2556,7 @@
                     <a:bodyPr/>
                     <a:lstStyle/>
                     <a:p>
-                      <a:pPr algn="l" marL="63500" marR="63500">
+                      <a:pPr algn="ctr" marL="63500" marR="63500">
                         <a:lnSpc>
                           <a:spcPct val="100000"/>
                         </a:lnSpc>
@@ -2569,7 +2569,7 @@
                         <a:buNone/>
                       </a:pPr>
                       <a:r>
-                        <a:rPr cap="none" sz="1100" i="0" b="0" u="none">
+                        <a:rPr cap="none" sz="1100" i="0" b="0" u="none" strike="noStrike">
                           <a:solidFill>
                             <a:srgbClr val="000000">
                               <a:alpha val="100000"/>
@@ -2628,7 +2628,7 @@
                         <a:buNone/>
                       </a:pPr>
                       <a:r>
-                        <a:rPr cap="none" sz="1100" i="0" b="0" u="none">
+                        <a:rPr cap="none" sz="1100" i="0" b="0" u="none" strike="noStrike">
                           <a:solidFill>
                             <a:srgbClr val="000000">
                               <a:alpha val="100000"/>
@@ -2672,7 +2672,7 @@
                     <a:bodyPr/>
                     <a:lstStyle/>
                     <a:p>
-                      <a:pPr algn="l" marL="63500" marR="63500">
+                      <a:pPr algn="ctr" marL="63500" marR="63500">
                         <a:lnSpc>
                           <a:spcPct val="100000"/>
                         </a:lnSpc>
@@ -2685,7 +2685,7 @@
                         <a:buNone/>
                       </a:pPr>
                       <a:r>
-                        <a:rPr cap="none" sz="1100" i="0" b="0" u="none">
+                        <a:rPr cap="none" sz="1100" i="0" b="0" u="none" strike="noStrike">
                           <a:solidFill>
                             <a:srgbClr val="000000">
                               <a:alpha val="100000"/>
@@ -2743,7 +2743,7 @@
                         </a:spcAft>
                         <a:buNone/>
                       </a:pPr>
-                      <a:endParaRPr cap="none" sz="1100" i="0" b="0" u="none">
+                      <a:endParaRPr cap="none" sz="1100" i="0" b="0" u="none" strike="noStrike">
                         <a:solidFill>
                           <a:srgbClr val="000000">
                             <a:alpha val="100000"/>
@@ -2755,7 +2755,7 @@
                         <a:sym typeface="Helvetica"/>
                       </a:endParaRPr>
                       <a:r>
-                        <a:rPr cap="none" sz="1100" i="0" b="0" u="none">
+                        <a:rPr cap="none" sz="1100" i="0" b="0" u="none" strike="noStrike">
                           <a:solidFill>
                             <a:srgbClr val="000000">
                               <a:alpha val="100000"/>
@@ -2783,8 +2783,12 @@
                       <a:noFill/>
                       <a:prstDash val="solid"/>
                     </a:lnT>
-                    <a:lnB algn="ctr" cmpd="sng" cap="flat" w="0">
-                      <a:noFill/>
+                    <a:lnB algn="ctr" cmpd="sng" cap="flat" w="9525">
+                      <a:solidFill>
+                        <a:srgbClr val="666666">
+                          <a:alpha val="100000"/>
+                        </a:srgbClr>
+                      </a:solidFill>
                       <a:prstDash val="solid"/>
                     </a:lnB>
                     <a:solidFill>
@@ -2799,7 +2803,7 @@
                     <a:bodyPr/>
                     <a:lstStyle/>
                     <a:p>
-                      <a:pPr algn="l" marL="63500" marR="63500">
+                      <a:pPr algn="ctr" marL="63500" marR="63500">
                         <a:lnSpc>
                           <a:spcPct val="100000"/>
                         </a:lnSpc>
@@ -2812,7 +2816,7 @@
                         <a:buNone/>
                       </a:pPr>
                       <a:r>
-                        <a:rPr cap="none" sz="1100" i="0" b="0" u="none">
+                        <a:rPr cap="none" sz="1100" i="0" b="0" u="none" strike="noStrike">
                           <a:solidFill>
                             <a:srgbClr val="000000">
                               <a:alpha val="100000"/>
@@ -2840,8 +2844,12 @@
                       <a:noFill/>
                       <a:prstDash val="solid"/>
                     </a:lnT>
-                    <a:lnB algn="ctr" cmpd="sng" cap="flat" w="0">
-                      <a:noFill/>
+                    <a:lnB algn="ctr" cmpd="sng" cap="flat" w="9525">
+                      <a:solidFill>
+                        <a:srgbClr val="666666">
+                          <a:alpha val="100000"/>
+                        </a:srgbClr>
+                      </a:solidFill>
                       <a:prstDash val="solid"/>
                     </a:lnB>
                     <a:solidFill>
@@ -2871,7 +2879,7 @@
                         <a:buNone/>
                       </a:pPr>
                       <a:r>
-                        <a:rPr cap="none" sz="1100" i="0" b="0" u="none">
+                        <a:rPr cap="none" sz="1100" i="0" b="0" u="none" strike="noStrike">
                           <a:solidFill>
                             <a:srgbClr val="000000">
                               <a:alpha val="100000"/>
@@ -2895,9 +2903,9 @@
                       <a:noFill/>
                       <a:prstDash val="solid"/>
                     </a:lnR>
-                    <a:lnT algn="ctr" cmpd="sng" cap="flat" w="12700">
+                    <a:lnT algn="ctr" cmpd="sng" cap="flat" w="9525">
                       <a:solidFill>
-                        <a:srgbClr val="000000">
+                        <a:srgbClr val="666666">
                           <a:alpha val="100000"/>
                         </a:srgbClr>
                       </a:solidFill>
@@ -2919,7 +2927,7 @@
                     <a:bodyPr/>
                     <a:lstStyle/>
                     <a:p>
-                      <a:pPr algn="l" marL="63500" marR="63500">
+                      <a:pPr algn="ctr" marL="63500" marR="63500">
                         <a:lnSpc>
                           <a:spcPct val="100000"/>
                         </a:lnSpc>
@@ -2932,7 +2940,7 @@
                         <a:buNone/>
                       </a:pPr>
                       <a:r>
-                        <a:rPr cap="none" sz="1100" i="0" b="0" u="none">
+                        <a:rPr cap="none" sz="1100" i="0" b="0" u="none" strike="noStrike">
                           <a:solidFill>
                             <a:srgbClr val="000000">
                               <a:alpha val="100000"/>
@@ -2956,9 +2964,9 @@
                       <a:noFill/>
                       <a:prstDash val="solid"/>
                     </a:lnR>
-                    <a:lnT algn="ctr" cmpd="sng" cap="flat" w="12700">
+                    <a:lnT algn="ctr" cmpd="sng" cap="flat" w="9525">
                       <a:solidFill>
-                        <a:srgbClr val="000000">
+                        <a:srgbClr val="666666">
                           <a:alpha val="100000"/>
                         </a:srgbClr>
                       </a:solidFill>
@@ -2995,7 +3003,7 @@
                         <a:buNone/>
                       </a:pPr>
                       <a:r>
-                        <a:rPr cap="none" sz="1100" i="0" b="0" u="none">
+                        <a:rPr cap="none" sz="1100" i="0" b="0" u="none" strike="noStrike">
                           <a:solidFill>
                             <a:srgbClr val="000000">
                               <a:alpha val="100000"/>
@@ -3043,7 +3051,7 @@
                     <a:bodyPr/>
                     <a:lstStyle/>
                     <a:p>
-                      <a:pPr algn="l" marL="63500" marR="63500">
+                      <a:pPr algn="ctr" marL="63500" marR="63500">
                         <a:lnSpc>
                           <a:spcPct val="100000"/>
                         </a:lnSpc>
@@ -3056,7 +3064,7 @@
                         <a:buNone/>
                       </a:pPr>
                       <a:r>
-                        <a:rPr cap="none" sz="1100" i="0" b="0" u="none">
+                        <a:rPr cap="none" sz="1100" i="0" b="0" u="none" strike="noStrike">
                           <a:solidFill>
                             <a:srgbClr val="000000">
                               <a:alpha val="100000"/>
@@ -3119,7 +3127,7 @@
                         <a:buNone/>
                       </a:pPr>
                       <a:r>
-                        <a:rPr cap="none" sz="1100" i="0" b="0" u="none">
+                        <a:rPr cap="none" sz="1100" i="0" b="0" u="none" strike="noStrike">
                           <a:solidFill>
                             <a:srgbClr val="000000">
                               <a:alpha val="100000"/>
@@ -3163,7 +3171,7 @@
                     <a:bodyPr/>
                     <a:lstStyle/>
                     <a:p>
-                      <a:pPr algn="l" marL="63500" marR="63500">
+                      <a:pPr algn="ctr" marL="63500" marR="63500">
                         <a:lnSpc>
                           <a:spcPct val="100000"/>
                         </a:lnSpc>
@@ -3176,7 +3184,7 @@
                         <a:buNone/>
                       </a:pPr>
                       <a:r>
-                        <a:rPr cap="none" sz="1100" i="0" b="0" u="none">
+                        <a:rPr cap="none" sz="1100" i="0" b="0" u="none" strike="noStrike">
                           <a:solidFill>
                             <a:srgbClr val="000000">
                               <a:alpha val="100000"/>
